--- a/effect-tests/style-library-v1/samples/style-sample-oriental-heritage.pptx
+++ b/effect-tests/style-library-v1/samples/style-sample-oriental-heritage.pptx
@@ -902,33 +902,88 @@
           </a:ln>
         </p:spPr>
       </p:sp>
-      <p:pic>
-        <p:nvPicPr>
-          <p:cNvPr id="3" name="Image 0" descr="/Users/dw/Desktop/codex-visual-asset-skills/effect-tests/style-library-v1/assets/background-oriental-heritage.png">    </p:cNvPr>
-          <p:cNvPicPr>
-            <a:picLocks noChangeAspect="1"/>
-          </p:cNvPicPr>
-          <p:nvPr/>
-        </p:nvPicPr>
-        <p:blipFill>
-          <a:blip r:embed="rId1"/>
-          <a:stretch>
-            <a:fillRect/>
-          </a:stretch>
-        </p:blipFill>
+      <p:sp>
+        <p:nvSpPr>
+          <p:cNvPr id="3" name="Shape 1"/>
+          <p:cNvSpPr/>
+          <p:nvPr/>
+        </p:nvSpPr>
         <p:spPr>
           <a:xfrm>
             <a:off x="0" y="0"/>
-            <a:ext cx="12191695" cy="6858000"/>
-          </a:xfrm>
-          <a:prstGeom prst="rect">
-            <a:avLst/>
-          </a:prstGeom>
-        </p:spPr>
-      </p:pic>
-      <p:sp>
-        <p:nvSpPr>
-          <p:cNvPr id="4" name="Text 1"/>
+            <a:ext cx="82296" cy="6858000"/>
+          </a:xfrm>
+          <a:prstGeom prst="rect">
+            <a:avLst/>
+          </a:prstGeom>
+          <a:solidFill>
+            <a:srgbClr val="B91C1C"/>
+          </a:solidFill>
+          <a:ln w="12700">
+            <a:solidFill>
+              <a:srgbClr val="B91C1C">
+                <a:alpha val="0"/>
+              </a:srgbClr>
+            </a:solidFill>
+            <a:prstDash val="solid"/>
+          </a:ln>
+        </p:spPr>
+      </p:sp>
+      <p:sp>
+        <p:nvSpPr>
+          <p:cNvPr id="4" name="Shape 2"/>
+          <p:cNvSpPr/>
+          <p:nvPr/>
+        </p:nvSpPr>
+        <p:spPr>
+          <a:xfrm>
+            <a:off x="10195560" y="868680"/>
+            <a:ext cx="676656" cy="0"/>
+          </a:xfrm>
+          <a:prstGeom prst="line">
+            <a:avLst/>
+          </a:prstGeom>
+          <a:noFill/>
+          <a:ln w="25400">
+            <a:solidFill>
+              <a:srgbClr val="B91C1C">
+                <a:alpha val="65000"/>
+              </a:srgbClr>
+            </a:solidFill>
+            <a:prstDash val="solid"/>
+          </a:ln>
+        </p:spPr>
+      </p:sp>
+      <p:sp>
+        <p:nvSpPr>
+          <p:cNvPr id="5" name="Shape 3"/>
+          <p:cNvSpPr/>
+          <p:nvPr/>
+        </p:nvSpPr>
+        <p:spPr>
+          <a:xfrm>
+            <a:off x="10442448" y="1078992"/>
+            <a:ext cx="402336" cy="402336"/>
+          </a:xfrm>
+          <a:prstGeom prst="rect">
+            <a:avLst/>
+          </a:prstGeom>
+          <a:solidFill>
+            <a:srgbClr val="B91C1C"/>
+          </a:solidFill>
+          <a:ln w="12700">
+            <a:solidFill>
+              <a:srgbClr val="333333">
+                <a:alpha val="0"/>
+              </a:srgbClr>
+            </a:solidFill>
+            <a:prstDash val="solid"/>
+          </a:ln>
+        </p:spPr>
+      </p:sp>
+      <p:sp>
+        <p:nvSpPr>
+          <p:cNvPr id="6" name="Text 4"/>
           <p:cNvSpPr/>
           <p:nvPr/>
         </p:nvSpPr>
@@ -969,7 +1024,7 @@
       </p:sp>
       <p:sp>
         <p:nvSpPr>
-          <p:cNvPr id="5" name="Text 2"/>
+          <p:cNvPr id="7" name="Text 5"/>
           <p:cNvSpPr/>
           <p:nvPr/>
         </p:nvSpPr>
@@ -1010,7 +1065,7 @@
       </p:sp>
       <p:sp>
         <p:nvSpPr>
-          <p:cNvPr id="6" name="Text 3"/>
+          <p:cNvPr id="8" name="Text 6"/>
           <p:cNvSpPr/>
           <p:nvPr/>
         </p:nvSpPr>
@@ -1051,7 +1106,7 @@
       </p:sp>
       <p:sp>
         <p:nvSpPr>
-          <p:cNvPr id="7" name="Shape 4"/>
+          <p:cNvPr id="9" name="Shape 7"/>
           <p:cNvSpPr/>
           <p:nvPr/>
         </p:nvSpPr>
@@ -1076,7 +1131,7 @@
       </p:sp>
       <p:sp>
         <p:nvSpPr>
-          <p:cNvPr id="8" name="Text 5"/>
+          <p:cNvPr id="10" name="Text 8"/>
           <p:cNvSpPr/>
           <p:nvPr/>
         </p:nvSpPr>
@@ -1117,7 +1172,7 @@
       </p:sp>
       <p:sp>
         <p:nvSpPr>
-          <p:cNvPr id="9" name="Text 6"/>
+          <p:cNvPr id="11" name="Text 9"/>
           <p:cNvSpPr/>
           <p:nvPr/>
         </p:nvSpPr>
@@ -1158,7 +1213,7 @@
       </p:sp>
       <p:sp>
         <p:nvSpPr>
-          <p:cNvPr id="10" name="Shape 7"/>
+          <p:cNvPr id="12" name="Shape 10"/>
           <p:cNvSpPr/>
           <p:nvPr/>
         </p:nvSpPr>
@@ -1185,7 +1240,7 @@
       </p:sp>
       <p:sp>
         <p:nvSpPr>
-          <p:cNvPr id="11" name="Text 8"/>
+          <p:cNvPr id="13" name="Text 11"/>
           <p:cNvSpPr/>
           <p:nvPr/>
         </p:nvSpPr>
@@ -1226,7 +1281,7 @@
       </p:sp>
       <p:sp>
         <p:nvSpPr>
-          <p:cNvPr id="12" name="Shape 9"/>
+          <p:cNvPr id="14" name="Shape 12"/>
           <p:cNvSpPr/>
           <p:nvPr/>
         </p:nvSpPr>
@@ -1253,7 +1308,7 @@
       </p:sp>
       <p:sp>
         <p:nvSpPr>
-          <p:cNvPr id="13" name="Text 10"/>
+          <p:cNvPr id="15" name="Text 13"/>
           <p:cNvSpPr/>
           <p:nvPr/>
         </p:nvSpPr>
@@ -1294,7 +1349,7 @@
       </p:sp>
       <p:sp>
         <p:nvSpPr>
-          <p:cNvPr id="14" name="Shape 11"/>
+          <p:cNvPr id="16" name="Shape 14"/>
           <p:cNvSpPr/>
           <p:nvPr/>
         </p:nvSpPr>
@@ -1321,7 +1376,7 @@
       </p:sp>
       <p:sp>
         <p:nvSpPr>
-          <p:cNvPr id="15" name="Text 12"/>
+          <p:cNvPr id="17" name="Text 15"/>
           <p:cNvSpPr/>
           <p:nvPr/>
         </p:nvSpPr>
@@ -1362,7 +1417,7 @@
       </p:sp>
       <p:sp>
         <p:nvSpPr>
-          <p:cNvPr id="16" name="Shape 13"/>
+          <p:cNvPr id="18" name="Shape 16"/>
           <p:cNvSpPr/>
           <p:nvPr/>
         </p:nvSpPr>
@@ -1387,7 +1442,7 @@
       </p:sp>
       <p:sp>
         <p:nvSpPr>
-          <p:cNvPr id="17" name="Text 14"/>
+          <p:cNvPr id="19" name="Text 17"/>
           <p:cNvSpPr/>
           <p:nvPr/>
         </p:nvSpPr>
@@ -1428,7 +1483,7 @@
       </p:sp>
       <p:sp>
         <p:nvSpPr>
-          <p:cNvPr id="18" name="Text 15"/>
+          <p:cNvPr id="20" name="Text 18"/>
           <p:cNvSpPr/>
           <p:nvPr/>
         </p:nvSpPr>
@@ -1469,7 +1524,7 @@
       </p:sp>
       <p:sp>
         <p:nvSpPr>
-          <p:cNvPr id="19" name="Shape 16"/>
+          <p:cNvPr id="21" name="Shape 19"/>
           <p:cNvSpPr/>
           <p:nvPr/>
         </p:nvSpPr>
@@ -1494,7 +1549,7 @@
       </p:sp>
       <p:sp>
         <p:nvSpPr>
-          <p:cNvPr id="20" name="Text 17"/>
+          <p:cNvPr id="22" name="Text 20"/>
           <p:cNvSpPr/>
           <p:nvPr/>
         </p:nvSpPr>
@@ -1535,7 +1590,7 @@
       </p:sp>
       <p:sp>
         <p:nvSpPr>
-          <p:cNvPr id="21" name="Text 18"/>
+          <p:cNvPr id="23" name="Text 21"/>
           <p:cNvSpPr/>
           <p:nvPr/>
         </p:nvSpPr>
@@ -1576,7 +1631,7 @@
       </p:sp>
       <p:sp>
         <p:nvSpPr>
-          <p:cNvPr id="22" name="Shape 19"/>
+          <p:cNvPr id="24" name="Shape 22"/>
           <p:cNvSpPr/>
           <p:nvPr/>
         </p:nvSpPr>
@@ -1601,7 +1656,7 @@
       </p:sp>
       <p:sp>
         <p:nvSpPr>
-          <p:cNvPr id="23" name="Text 20"/>
+          <p:cNvPr id="25" name="Text 23"/>
           <p:cNvSpPr/>
           <p:nvPr/>
         </p:nvSpPr>
@@ -1642,7 +1697,7 @@
       </p:sp>
       <p:sp>
         <p:nvSpPr>
-          <p:cNvPr id="24" name="Text 21"/>
+          <p:cNvPr id="26" name="Text 24"/>
           <p:cNvSpPr/>
           <p:nvPr/>
         </p:nvSpPr>
@@ -1683,7 +1738,7 @@
       </p:sp>
       <p:sp>
         <p:nvSpPr>
-          <p:cNvPr id="25" name="Text 22"/>
+          <p:cNvPr id="27" name="Text 25"/>
           <p:cNvSpPr/>
           <p:nvPr/>
         </p:nvSpPr>
@@ -1724,7 +1779,7 @@
       </p:sp>
       <p:sp>
         <p:nvSpPr>
-          <p:cNvPr id="26" name="Shape 23"/>
+          <p:cNvPr id="28" name="Shape 26"/>
           <p:cNvSpPr/>
           <p:nvPr/>
         </p:nvSpPr>
@@ -1749,7 +1804,7 @@
       </p:sp>
       <p:sp>
         <p:nvSpPr>
-          <p:cNvPr id="27" name="Shape 24"/>
+          <p:cNvPr id="29" name="Shape 27"/>
           <p:cNvSpPr/>
           <p:nvPr/>
         </p:nvSpPr>
@@ -1774,7 +1829,7 @@
       </p:sp>
       <p:sp>
         <p:nvSpPr>
-          <p:cNvPr id="28" name="Shape 25"/>
+          <p:cNvPr id="30" name="Shape 28"/>
           <p:cNvSpPr/>
           <p:nvPr/>
         </p:nvSpPr>
@@ -1801,7 +1856,7 @@
       </p:sp>
       <p:sp>
         <p:nvSpPr>
-          <p:cNvPr id="29" name="Text 26"/>
+          <p:cNvPr id="31" name="Text 29"/>
           <p:cNvSpPr/>
           <p:nvPr/>
         </p:nvSpPr>
@@ -1842,7 +1897,7 @@
       </p:sp>
       <p:sp>
         <p:nvSpPr>
-          <p:cNvPr id="30" name="Shape 27"/>
+          <p:cNvPr id="32" name="Shape 30"/>
           <p:cNvSpPr/>
           <p:nvPr/>
         </p:nvSpPr>
@@ -1869,7 +1924,7 @@
       </p:sp>
       <p:sp>
         <p:nvSpPr>
-          <p:cNvPr id="31" name="Text 28"/>
+          <p:cNvPr id="33" name="Text 31"/>
           <p:cNvSpPr/>
           <p:nvPr/>
         </p:nvSpPr>
@@ -1910,7 +1965,7 @@
       </p:sp>
       <p:sp>
         <p:nvSpPr>
-          <p:cNvPr id="32" name="Shape 29"/>
+          <p:cNvPr id="34" name="Shape 32"/>
           <p:cNvSpPr/>
           <p:nvPr/>
         </p:nvSpPr>
@@ -1937,7 +1992,7 @@
       </p:sp>
       <p:sp>
         <p:nvSpPr>
-          <p:cNvPr id="33" name="Text 30"/>
+          <p:cNvPr id="35" name="Text 33"/>
           <p:cNvSpPr/>
           <p:nvPr/>
         </p:nvSpPr>
@@ -1978,7 +2033,7 @@
       </p:sp>
       <p:sp>
         <p:nvSpPr>
-          <p:cNvPr id="34" name="Shape 31"/>
+          <p:cNvPr id="36" name="Shape 34"/>
           <p:cNvSpPr/>
           <p:nvPr/>
         </p:nvSpPr>
@@ -2005,7 +2060,7 @@
       </p:sp>
       <p:sp>
         <p:nvSpPr>
-          <p:cNvPr id="35" name="Text 32"/>
+          <p:cNvPr id="37" name="Text 35"/>
           <p:cNvSpPr/>
           <p:nvPr/>
         </p:nvSpPr>

--- a/effect-tests/style-library-v1/samples/style-sample-oriental-heritage.pptx
+++ b/effect-tests/style-library-v1/samples/style-sample-oriental-heritage.pptx
@@ -902,74 +902,48 @@
           </a:ln>
         </p:spPr>
       </p:sp>
-      <p:sp>
-        <p:nvSpPr>
-          <p:cNvPr id="3" name="Shape 1"/>
-          <p:cNvSpPr/>
-          <p:nvPr/>
-        </p:nvSpPr>
+      <p:pic>
+        <p:nvPicPr>
+          <p:cNvPr id="3" name="Image 0" descr="/Users/dw/Desktop/codex-visual-ppt-deck-builder/effect-tests/style-library-v1/assets/background-oriental-heritage.png">    </p:cNvPr>
+          <p:cNvPicPr>
+            <a:picLocks noChangeAspect="1"/>
+          </p:cNvPicPr>
+          <p:nvPr/>
+        </p:nvPicPr>
+        <p:blipFill>
+          <a:blip r:embed="rId1"/>
+          <a:stretch>
+            <a:fillRect/>
+          </a:stretch>
+        </p:blipFill>
         <p:spPr>
           <a:xfrm>
             <a:off x="0" y="0"/>
-            <a:ext cx="82296" cy="6858000"/>
-          </a:xfrm>
-          <a:prstGeom prst="rect">
-            <a:avLst/>
-          </a:prstGeom>
-          <a:solidFill>
-            <a:srgbClr val="B91C1C"/>
-          </a:solidFill>
-          <a:ln w="12700">
-            <a:solidFill>
-              <a:srgbClr val="B91C1C">
-                <a:alpha val="0"/>
-              </a:srgbClr>
-            </a:solidFill>
-            <a:prstDash val="solid"/>
-          </a:ln>
-        </p:spPr>
-      </p:sp>
-      <p:sp>
-        <p:nvSpPr>
-          <p:cNvPr id="4" name="Shape 2"/>
-          <p:cNvSpPr/>
-          <p:nvPr/>
-        </p:nvSpPr>
-        <p:spPr>
-          <a:xfrm>
-            <a:off x="10195560" y="868680"/>
-            <a:ext cx="676656" cy="0"/>
-          </a:xfrm>
-          <a:prstGeom prst="line">
-            <a:avLst/>
-          </a:prstGeom>
-          <a:noFill/>
-          <a:ln w="25400">
-            <a:solidFill>
-              <a:srgbClr val="B91C1C">
-                <a:alpha val="65000"/>
-              </a:srgbClr>
-            </a:solidFill>
-            <a:prstDash val="solid"/>
-          </a:ln>
-        </p:spPr>
-      </p:sp>
-      <p:sp>
-        <p:nvSpPr>
-          <p:cNvPr id="5" name="Shape 3"/>
-          <p:cNvSpPr/>
-          <p:nvPr/>
-        </p:nvSpPr>
-        <p:spPr>
-          <a:xfrm>
-            <a:off x="10442448" y="1078992"/>
-            <a:ext cx="402336" cy="402336"/>
-          </a:xfrm>
-          <a:prstGeom prst="rect">
-            <a:avLst/>
-          </a:prstGeom>
-          <a:solidFill>
-            <a:srgbClr val="B91C1C"/>
+            <a:ext cx="12191695" cy="6858000"/>
+          </a:xfrm>
+          <a:prstGeom prst="rect">
+            <a:avLst/>
+          </a:prstGeom>
+        </p:spPr>
+      </p:pic>
+      <p:sp>
+        <p:nvSpPr>
+          <p:cNvPr id="4" name="Shape 1"/>
+          <p:cNvSpPr/>
+          <p:nvPr/>
+        </p:nvSpPr>
+        <p:spPr>
+          <a:xfrm>
+            <a:off x="0" y="0"/>
+            <a:ext cx="12191695" cy="6858000"/>
+          </a:xfrm>
+          <a:prstGeom prst="rect">
+            <a:avLst/>
+          </a:prstGeom>
+          <a:solidFill>
+            <a:srgbClr val="FAF8F2">
+              <a:alpha val="82000"/>
+            </a:srgbClr>
           </a:solidFill>
           <a:ln w="12700">
             <a:solidFill>
@@ -983,14 +957,14 @@
       </p:sp>
       <p:sp>
         <p:nvSpPr>
-          <p:cNvPr id="6" name="Text 4"/>
-          <p:cNvSpPr/>
-          <p:nvPr/>
-        </p:nvSpPr>
-        <p:spPr>
-          <a:xfrm>
-            <a:off x="2331720" y="512064"/>
-            <a:ext cx="2011680" cy="164592"/>
+          <p:cNvPr id="5" name="Text 2"/>
+          <p:cNvSpPr/>
+          <p:nvPr/>
+        </p:nvSpPr>
+        <p:spPr>
+          <a:xfrm>
+            <a:off x="2331720" y="411480"/>
+            <a:ext cx="2468880" cy="164592"/>
           </a:xfrm>
           <a:prstGeom prst="rect">
             <a:avLst/>
@@ -1012,11 +986,11 @@
                 <a:solidFill>
                   <a:srgbClr val="B91C1C"/>
                 </a:solidFill>
-                <a:latin typeface="PingFang SC" pitchFamily="34" charset="0"/>
-                <a:ea typeface="PingFang SC" pitchFamily="34" charset="-122"/>
-                <a:cs typeface="PingFang SC" pitchFamily="34" charset="-120"/>
+                <a:latin typeface="Avenir Next" pitchFamily="34" charset="0"/>
+                <a:ea typeface="Avenir Next" pitchFamily="34" charset="-122"/>
+                <a:cs typeface="Avenir Next" pitchFamily="34" charset="-120"/>
               </a:rPr>
-              <a:t>2026 RESEARCH</a:t>
+              <a:t>BRAND NARRATIVE</a:t>
             </a:r>
             <a:endParaRPr lang="en-US" sz="750" dirty="0"/>
           </a:p>
@@ -1024,14 +998,14 @@
       </p:sp>
       <p:sp>
         <p:nvSpPr>
-          <p:cNvPr id="7" name="Text 5"/>
-          <p:cNvSpPr/>
-          <p:nvPr/>
-        </p:nvSpPr>
-        <p:spPr>
-          <a:xfrm>
-            <a:off x="2331720" y="786384"/>
-            <a:ext cx="4389120" cy="777240"/>
+          <p:cNvPr id="6" name="Text 3"/>
+          <p:cNvSpPr/>
+          <p:nvPr/>
+        </p:nvSpPr>
+        <p:spPr>
+          <a:xfrm>
+            <a:off x="2304288" y="786384"/>
+            <a:ext cx="4526280" cy="822960"/>
           </a:xfrm>
           <a:prstGeom prst="rect">
             <a:avLst/>
@@ -1051,11 +1025,11 @@
             <a:r>
               <a:rPr lang="en-US" sz="2500" b="1" dirty="0">
                 <a:solidFill>
-                  <a:srgbClr val="B91C1C"/>
+                  <a:srgbClr val="C32727"/>
                 </a:solidFill>
-                <a:latin typeface="PingFang SC" pitchFamily="34" charset="0"/>
-                <a:ea typeface="PingFang SC" pitchFamily="34" charset="-122"/>
-                <a:cs typeface="PingFang SC" pitchFamily="34" charset="-120"/>
+                <a:latin typeface="Songti SC" pitchFamily="34" charset="0"/>
+                <a:ea typeface="Songti SC" pitchFamily="34" charset="-122"/>
+                <a:cs typeface="Songti SC" pitchFamily="34" charset="-120"/>
               </a:rPr>
               <a:t>2026 AI 应用趋势调研</a:t>
             </a:r>
@@ -1065,14 +1039,14 @@
       </p:sp>
       <p:sp>
         <p:nvSpPr>
-          <p:cNvPr id="8" name="Text 6"/>
-          <p:cNvSpPr/>
-          <p:nvPr/>
-        </p:nvSpPr>
-        <p:spPr>
-          <a:xfrm>
-            <a:off x="4069080" y="1554480"/>
-            <a:ext cx="2560320" cy="228600"/>
+          <p:cNvPr id="7" name="Text 4"/>
+          <p:cNvSpPr/>
+          <p:nvPr/>
+        </p:nvSpPr>
+        <p:spPr>
+          <a:xfrm>
+            <a:off x="4133088" y="1572768"/>
+            <a:ext cx="2377440" cy="219456"/>
           </a:xfrm>
           <a:prstGeom prst="rect">
             <a:avLst/>
@@ -1090,7 +1064,7 @@
               <a:buNone/>
             </a:pPr>
             <a:r>
-              <a:rPr lang="en-US" sz="1050" b="1" dirty="0">
+              <a:rPr lang="en-US" sz="1040" b="1" dirty="0">
                 <a:solidFill>
                   <a:srgbClr val="B91C1C"/>
                 </a:solidFill>
@@ -1100,20 +1074,20 @@
               </a:rPr>
               <a:t>品牌战略解读样张</a:t>
             </a:r>
-            <a:endParaRPr lang="en-US" sz="1050" dirty="0"/>
-          </a:p>
-        </p:txBody>
-      </p:sp>
-      <p:sp>
-        <p:nvSpPr>
-          <p:cNvPr id="9" name="Shape 7"/>
-          <p:cNvSpPr/>
-          <p:nvPr/>
-        </p:nvSpPr>
-        <p:spPr>
-          <a:xfrm>
-            <a:off x="2788920" y="1828800"/>
-            <a:ext cx="512064" cy="0"/>
+            <a:endParaRPr lang="en-US" sz="1040" dirty="0"/>
+          </a:p>
+        </p:txBody>
+      </p:sp>
+      <p:sp>
+        <p:nvSpPr>
+          <p:cNvPr id="8" name="Shape 5"/>
+          <p:cNvSpPr/>
+          <p:nvPr/>
+        </p:nvSpPr>
+        <p:spPr>
+          <a:xfrm>
+            <a:off x="2779776" y="1847088"/>
+            <a:ext cx="658368" cy="0"/>
           </a:xfrm>
           <a:prstGeom prst="line">
             <a:avLst/>
@@ -1122,7 +1096,7 @@
           <a:ln w="25400">
             <a:solidFill>
               <a:srgbClr val="B91C1C">
-                <a:alpha val="65000"/>
+                <a:alpha val="90000"/>
               </a:srgbClr>
             </a:solidFill>
             <a:prstDash val="solid"/>
@@ -1131,14 +1105,14 @@
       </p:sp>
       <p:sp>
         <p:nvSpPr>
-          <p:cNvPr id="10" name="Text 8"/>
-          <p:cNvSpPr/>
-          <p:nvPr/>
-        </p:nvSpPr>
-        <p:spPr>
-          <a:xfrm>
-            <a:off x="2788920" y="2011680"/>
-            <a:ext cx="1645920" cy="256032"/>
+          <p:cNvPr id="9" name="Text 6"/>
+          <p:cNvSpPr/>
+          <p:nvPr/>
+        </p:nvSpPr>
+        <p:spPr>
+          <a:xfrm>
+            <a:off x="2779776" y="2029968"/>
+            <a:ext cx="2011680" cy="256032"/>
           </a:xfrm>
           <a:prstGeom prst="rect">
             <a:avLst/>
@@ -1172,14 +1146,14 @@
       </p:sp>
       <p:sp>
         <p:nvSpPr>
-          <p:cNvPr id="11" name="Text 9"/>
-          <p:cNvSpPr/>
-          <p:nvPr/>
-        </p:nvSpPr>
-        <p:spPr>
-          <a:xfrm>
-            <a:off x="2788920" y="2514600"/>
-            <a:ext cx="3566160" cy="603504"/>
+          <p:cNvPr id="10" name="Text 7"/>
+          <p:cNvSpPr/>
+          <p:nvPr/>
+        </p:nvSpPr>
+        <p:spPr>
+          <a:xfrm>
+            <a:off x="2779776" y="2542032"/>
+            <a:ext cx="3493008" cy="640080"/>
           </a:xfrm>
           <a:prstGeom prst="rect">
             <a:avLst/>
@@ -1213,13 +1187,13 @@
       </p:sp>
       <p:sp>
         <p:nvSpPr>
-          <p:cNvPr id="12" name="Shape 10"/>
-          <p:cNvSpPr/>
-          <p:nvPr/>
-        </p:nvSpPr>
-        <p:spPr>
-          <a:xfrm>
-            <a:off x="2807208" y="3310128"/>
+          <p:cNvPr id="11" name="Shape 8"/>
+          <p:cNvSpPr/>
+          <p:nvPr/>
+        </p:nvSpPr>
+        <p:spPr>
+          <a:xfrm>
+            <a:off x="2798064" y="3346704"/>
             <a:ext cx="73152" cy="73152"/>
           </a:xfrm>
           <a:prstGeom prst="ellipse">
@@ -1240,14 +1214,14 @@
       </p:sp>
       <p:sp>
         <p:nvSpPr>
-          <p:cNvPr id="13" name="Text 11"/>
-          <p:cNvSpPr/>
-          <p:nvPr/>
-        </p:nvSpPr>
-        <p:spPr>
-          <a:xfrm>
-            <a:off x="2971800" y="3255264"/>
-            <a:ext cx="3108960" cy="164592"/>
+          <p:cNvPr id="12" name="Text 9"/>
+          <p:cNvSpPr/>
+          <p:nvPr/>
+        </p:nvSpPr>
+        <p:spPr>
+          <a:xfrm>
+            <a:off x="2962656" y="3291840"/>
+            <a:ext cx="3063240" cy="164592"/>
           </a:xfrm>
           <a:prstGeom prst="rect">
             <a:avLst/>
@@ -1281,13 +1255,13 @@
       </p:sp>
       <p:sp>
         <p:nvSpPr>
-          <p:cNvPr id="14" name="Shape 12"/>
-          <p:cNvSpPr/>
-          <p:nvPr/>
-        </p:nvSpPr>
-        <p:spPr>
-          <a:xfrm>
-            <a:off x="2807208" y="3602736"/>
+          <p:cNvPr id="13" name="Shape 10"/>
+          <p:cNvSpPr/>
+          <p:nvPr/>
+        </p:nvSpPr>
+        <p:spPr>
+          <a:xfrm>
+            <a:off x="2798064" y="3639312"/>
             <a:ext cx="73152" cy="73152"/>
           </a:xfrm>
           <a:prstGeom prst="ellipse">
@@ -1308,14 +1282,14 @@
       </p:sp>
       <p:sp>
         <p:nvSpPr>
-          <p:cNvPr id="15" name="Text 13"/>
-          <p:cNvSpPr/>
-          <p:nvPr/>
-        </p:nvSpPr>
-        <p:spPr>
-          <a:xfrm>
-            <a:off x="2971800" y="3547872"/>
-            <a:ext cx="3108960" cy="164592"/>
+          <p:cNvPr id="14" name="Text 11"/>
+          <p:cNvSpPr/>
+          <p:nvPr/>
+        </p:nvSpPr>
+        <p:spPr>
+          <a:xfrm>
+            <a:off x="2962656" y="3584448"/>
+            <a:ext cx="3063240" cy="164592"/>
           </a:xfrm>
           <a:prstGeom prst="rect">
             <a:avLst/>
@@ -1349,13 +1323,13 @@
       </p:sp>
       <p:sp>
         <p:nvSpPr>
-          <p:cNvPr id="16" name="Shape 14"/>
-          <p:cNvSpPr/>
-          <p:nvPr/>
-        </p:nvSpPr>
-        <p:spPr>
-          <a:xfrm>
-            <a:off x="2807208" y="3895344"/>
+          <p:cNvPr id="15" name="Shape 12"/>
+          <p:cNvSpPr/>
+          <p:nvPr/>
+        </p:nvSpPr>
+        <p:spPr>
+          <a:xfrm>
+            <a:off x="2798064" y="3931920"/>
             <a:ext cx="73152" cy="73152"/>
           </a:xfrm>
           <a:prstGeom prst="ellipse">
@@ -1376,14 +1350,14 @@
       </p:sp>
       <p:sp>
         <p:nvSpPr>
-          <p:cNvPr id="17" name="Text 15"/>
-          <p:cNvSpPr/>
-          <p:nvPr/>
-        </p:nvSpPr>
-        <p:spPr>
-          <a:xfrm>
-            <a:off x="2971800" y="3840480"/>
-            <a:ext cx="3108960" cy="164592"/>
+          <p:cNvPr id="16" name="Text 13"/>
+          <p:cNvSpPr/>
+          <p:nvPr/>
+        </p:nvSpPr>
+        <p:spPr>
+          <a:xfrm>
+            <a:off x="2962656" y="3877056"/>
+            <a:ext cx="3063240" cy="164592"/>
           </a:xfrm>
           <a:prstGeom prst="rect">
             <a:avLst/>
@@ -1417,23 +1391,23 @@
       </p:sp>
       <p:sp>
         <p:nvSpPr>
-          <p:cNvPr id="18" name="Shape 16"/>
-          <p:cNvSpPr/>
-          <p:nvPr/>
-        </p:nvSpPr>
-        <p:spPr>
-          <a:xfrm>
-            <a:off x="2148840" y="4983480"/>
-            <a:ext cx="530352" cy="0"/>
+          <p:cNvPr id="17" name="Shape 14"/>
+          <p:cNvSpPr/>
+          <p:nvPr/>
+        </p:nvSpPr>
+        <p:spPr>
+          <a:xfrm>
+            <a:off x="2212848" y="4956048"/>
+            <a:ext cx="457200" cy="0"/>
           </a:xfrm>
           <a:prstGeom prst="line">
             <a:avLst/>
           </a:prstGeom>
           <a:noFill/>
-          <a:ln w="25400">
+          <a:ln w="17780">
             <a:solidFill>
               <a:srgbClr val="B91C1C">
-                <a:alpha val="78000"/>
+                <a:alpha val="90000"/>
               </a:srgbClr>
             </a:solidFill>
             <a:prstDash val="solid"/>
@@ -1442,14 +1416,14 @@
       </p:sp>
       <p:sp>
         <p:nvSpPr>
-          <p:cNvPr id="19" name="Text 17"/>
-          <p:cNvSpPr/>
-          <p:nvPr/>
-        </p:nvSpPr>
-        <p:spPr>
-          <a:xfrm>
-            <a:off x="2148840" y="5111496"/>
-            <a:ext cx="1527048" cy="329184"/>
+          <p:cNvPr id="18" name="Text 15"/>
+          <p:cNvSpPr/>
+          <p:nvPr/>
+        </p:nvSpPr>
+        <p:spPr>
+          <a:xfrm>
+            <a:off x="2212848" y="5084064"/>
+            <a:ext cx="1444752" cy="310896"/>
           </a:xfrm>
           <a:prstGeom prst="rect">
             <a:avLst/>
@@ -1471,9 +1445,9 @@
                 <a:solidFill>
                   <a:srgbClr val="B91C1C"/>
                 </a:solidFill>
-                <a:latin typeface="PingFang SC" pitchFamily="34" charset="0"/>
-                <a:ea typeface="PingFang SC" pitchFamily="34" charset="-122"/>
-                <a:cs typeface="PingFang SC" pitchFamily="34" charset="-120"/>
+                <a:latin typeface="Songti SC" pitchFamily="34" charset="0"/>
+                <a:ea typeface="Songti SC" pitchFamily="34" charset="-122"/>
+                <a:cs typeface="Songti SC" pitchFamily="34" charset="-120"/>
               </a:rPr>
               <a:t>器</a:t>
             </a:r>
@@ -1483,14 +1457,14 @@
       </p:sp>
       <p:sp>
         <p:nvSpPr>
-          <p:cNvPr id="20" name="Text 18"/>
-          <p:cNvSpPr/>
-          <p:nvPr/>
-        </p:nvSpPr>
-        <p:spPr>
-          <a:xfrm>
-            <a:off x="2148840" y="5477256"/>
-            <a:ext cx="1527048" cy="228600"/>
+          <p:cNvPr id="19" name="Text 16"/>
+          <p:cNvSpPr/>
+          <p:nvPr/>
+        </p:nvSpPr>
+        <p:spPr>
+          <a:xfrm>
+            <a:off x="2212848" y="5431536"/>
+            <a:ext cx="1444752" cy="164592"/>
           </a:xfrm>
           <a:prstGeom prst="rect">
             <a:avLst/>
@@ -1508,73 +1482,7 @@
               <a:buNone/>
             </a:pPr>
             <a:r>
-              <a:rPr lang="en-US" sz="720" b="1" dirty="0">
-                <a:solidFill>
-                  <a:srgbClr val="B91C1C"/>
-                </a:solidFill>
-                <a:latin typeface="PingFang SC" pitchFamily="34" charset="0"/>
-                <a:ea typeface="PingFang SC" pitchFamily="34" charset="-122"/>
-                <a:cs typeface="PingFang SC" pitchFamily="34" charset="-120"/>
-              </a:rPr>
-              <a:t>工具入局</a:t>
-            </a:r>
-            <a:endParaRPr lang="en-US" sz="720" dirty="0"/>
-          </a:p>
-        </p:txBody>
-      </p:sp>
-      <p:sp>
-        <p:nvSpPr>
-          <p:cNvPr id="21" name="Shape 19"/>
-          <p:cNvSpPr/>
-          <p:nvPr/>
-        </p:nvSpPr>
-        <p:spPr>
-          <a:xfrm>
-            <a:off x="3840480" y="4983480"/>
-            <a:ext cx="530352" cy="0"/>
-          </a:xfrm>
-          <a:prstGeom prst="line">
-            <a:avLst/>
-          </a:prstGeom>
-          <a:noFill/>
-          <a:ln w="25400">
-            <a:solidFill>
-              <a:srgbClr val="171717">
-                <a:alpha val="78000"/>
-              </a:srgbClr>
-            </a:solidFill>
-            <a:prstDash val="solid"/>
-          </a:ln>
-        </p:spPr>
-      </p:sp>
-      <p:sp>
-        <p:nvSpPr>
-          <p:cNvPr id="22" name="Text 20"/>
-          <p:cNvSpPr/>
-          <p:nvPr/>
-        </p:nvSpPr>
-        <p:spPr>
-          <a:xfrm>
-            <a:off x="3840480" y="5111496"/>
-            <a:ext cx="1527048" cy="329184"/>
-          </a:xfrm>
-          <a:prstGeom prst="rect">
-            <a:avLst/>
-          </a:prstGeom>
-          <a:noFill/>
-          <a:ln/>
-        </p:spPr>
-        <p:txBody>
-          <a:bodyPr wrap="square" lIns="0" tIns="0" rIns="0" bIns="0" rtlCol="0" anchor="ctr">
-            <a:normAutofit/>
-          </a:bodyPr>
-          <a:lstStyle/>
-          <a:p>
-            <a:pPr algn="l" indent="0" marL="0">
-              <a:buNone/>
-            </a:pPr>
-            <a:r>
-              <a:rPr lang="en-US" sz="1800" b="1" dirty="0">
+              <a:rPr lang="en-US" sz="720" dirty="0">
                 <a:solidFill>
                   <a:srgbClr val="171717"/>
                 </a:solidFill>
@@ -1582,22 +1490,47 @@
                 <a:ea typeface="PingFang SC" pitchFamily="34" charset="-122"/>
                 <a:cs typeface="PingFang SC" pitchFamily="34" charset="-120"/>
               </a:rPr>
-              <a:t>术</a:t>
-            </a:r>
-            <a:endParaRPr lang="en-US" sz="1800" dirty="0"/>
-          </a:p>
-        </p:txBody>
-      </p:sp>
-      <p:sp>
-        <p:nvSpPr>
-          <p:cNvPr id="23" name="Text 21"/>
-          <p:cNvSpPr/>
-          <p:nvPr/>
-        </p:nvSpPr>
-        <p:spPr>
-          <a:xfrm>
-            <a:off x="3840480" y="5477256"/>
-            <a:ext cx="1527048" cy="228600"/>
+              <a:t>工具入局</a:t>
+            </a:r>
+            <a:endParaRPr lang="en-US" sz="720" dirty="0"/>
+          </a:p>
+        </p:txBody>
+      </p:sp>
+      <p:sp>
+        <p:nvSpPr>
+          <p:cNvPr id="20" name="Shape 17"/>
+          <p:cNvSpPr/>
+          <p:nvPr/>
+        </p:nvSpPr>
+        <p:spPr>
+          <a:xfrm>
+            <a:off x="3803904" y="4956048"/>
+            <a:ext cx="457200" cy="0"/>
+          </a:xfrm>
+          <a:prstGeom prst="line">
+            <a:avLst/>
+          </a:prstGeom>
+          <a:noFill/>
+          <a:ln w="17780">
+            <a:solidFill>
+              <a:srgbClr val="171717">
+                <a:alpha val="90000"/>
+              </a:srgbClr>
+            </a:solidFill>
+            <a:prstDash val="solid"/>
+          </a:ln>
+        </p:spPr>
+      </p:sp>
+      <p:sp>
+        <p:nvSpPr>
+          <p:cNvPr id="21" name="Text 18"/>
+          <p:cNvSpPr/>
+          <p:nvPr/>
+        </p:nvSpPr>
+        <p:spPr>
+          <a:xfrm>
+            <a:off x="3803904" y="5084064"/>
+            <a:ext cx="1444752" cy="310896"/>
           </a:xfrm>
           <a:prstGeom prst="rect">
             <a:avLst/>
@@ -1615,9 +1548,50 @@
               <a:buNone/>
             </a:pPr>
             <a:r>
-              <a:rPr lang="en-US" sz="720" b="1" dirty="0">
+              <a:rPr lang="en-US" sz="1800" b="1" dirty="0">
                 <a:solidFill>
-                  <a:srgbClr val="B91C1C"/>
+                  <a:srgbClr val="171717"/>
+                </a:solidFill>
+                <a:latin typeface="Songti SC" pitchFamily="34" charset="0"/>
+                <a:ea typeface="Songti SC" pitchFamily="34" charset="-122"/>
+                <a:cs typeface="Songti SC" pitchFamily="34" charset="-120"/>
+              </a:rPr>
+              <a:t>术</a:t>
+            </a:r>
+            <a:endParaRPr lang="en-US" sz="1800" dirty="0"/>
+          </a:p>
+        </p:txBody>
+      </p:sp>
+      <p:sp>
+        <p:nvSpPr>
+          <p:cNvPr id="22" name="Text 19"/>
+          <p:cNvSpPr/>
+          <p:nvPr/>
+        </p:nvSpPr>
+        <p:spPr>
+          <a:xfrm>
+            <a:off x="3803904" y="5431536"/>
+            <a:ext cx="1444752" cy="164592"/>
+          </a:xfrm>
+          <a:prstGeom prst="rect">
+            <a:avLst/>
+          </a:prstGeom>
+          <a:noFill/>
+          <a:ln/>
+        </p:spPr>
+        <p:txBody>
+          <a:bodyPr wrap="square" lIns="0" tIns="0" rIns="0" bIns="0" rtlCol="0" anchor="ctr">
+            <a:normAutofit/>
+          </a:bodyPr>
+          <a:lstStyle/>
+          <a:p>
+            <a:pPr algn="l" indent="0" marL="0">
+              <a:buNone/>
+            </a:pPr>
+            <a:r>
+              <a:rPr lang="en-US" sz="720" dirty="0">
+                <a:solidFill>
+                  <a:srgbClr val="171717"/>
                 </a:solidFill>
                 <a:latin typeface="PingFang SC" pitchFamily="34" charset="0"/>
                 <a:ea typeface="PingFang SC" pitchFamily="34" charset="-122"/>
@@ -1631,23 +1605,23 @@
       </p:sp>
       <p:sp>
         <p:nvSpPr>
-          <p:cNvPr id="24" name="Shape 22"/>
-          <p:cNvSpPr/>
-          <p:nvPr/>
-        </p:nvSpPr>
-        <p:spPr>
-          <a:xfrm>
-            <a:off x="5532120" y="4983480"/>
-            <a:ext cx="530352" cy="0"/>
+          <p:cNvPr id="23" name="Shape 20"/>
+          <p:cNvSpPr/>
+          <p:nvPr/>
+        </p:nvSpPr>
+        <p:spPr>
+          <a:xfrm>
+            <a:off x="5394960" y="4956048"/>
+            <a:ext cx="457200" cy="0"/>
           </a:xfrm>
           <a:prstGeom prst="line">
             <a:avLst/>
           </a:prstGeom>
           <a:noFill/>
-          <a:ln w="25400">
+          <a:ln w="17780">
             <a:solidFill>
               <a:srgbClr val="B91C1C">
-                <a:alpha val="78000"/>
+                <a:alpha val="90000"/>
               </a:srgbClr>
             </a:solidFill>
             <a:prstDash val="solid"/>
@@ -1656,14 +1630,14 @@
       </p:sp>
       <p:sp>
         <p:nvSpPr>
-          <p:cNvPr id="25" name="Text 23"/>
-          <p:cNvSpPr/>
-          <p:nvPr/>
-        </p:nvSpPr>
-        <p:spPr>
-          <a:xfrm>
-            <a:off x="5532120" y="5111496"/>
-            <a:ext cx="1527048" cy="329184"/>
+          <p:cNvPr id="24" name="Text 21"/>
+          <p:cNvSpPr/>
+          <p:nvPr/>
+        </p:nvSpPr>
+        <p:spPr>
+          <a:xfrm>
+            <a:off x="5394960" y="5084064"/>
+            <a:ext cx="1444752" cy="310896"/>
           </a:xfrm>
           <a:prstGeom prst="rect">
             <a:avLst/>
@@ -1685,9 +1659,9 @@
                 <a:solidFill>
                   <a:srgbClr val="B91C1C"/>
                 </a:solidFill>
-                <a:latin typeface="PingFang SC" pitchFamily="34" charset="0"/>
-                <a:ea typeface="PingFang SC" pitchFamily="34" charset="-122"/>
-                <a:cs typeface="PingFang SC" pitchFamily="34" charset="-120"/>
+                <a:latin typeface="Songti SC" pitchFamily="34" charset="0"/>
+                <a:ea typeface="Songti SC" pitchFamily="34" charset="-122"/>
+                <a:cs typeface="Songti SC" pitchFamily="34" charset="-120"/>
               </a:rPr>
               <a:t>法</a:t>
             </a:r>
@@ -1697,14 +1671,14 @@
       </p:sp>
       <p:sp>
         <p:nvSpPr>
-          <p:cNvPr id="26" name="Text 24"/>
-          <p:cNvSpPr/>
-          <p:nvPr/>
-        </p:nvSpPr>
-        <p:spPr>
-          <a:xfrm>
-            <a:off x="5532120" y="5477256"/>
-            <a:ext cx="1527048" cy="228600"/>
+          <p:cNvPr id="25" name="Text 22"/>
+          <p:cNvSpPr/>
+          <p:nvPr/>
+        </p:nvSpPr>
+        <p:spPr>
+          <a:xfrm>
+            <a:off x="5394960" y="5431536"/>
+            <a:ext cx="1444752" cy="164592"/>
           </a:xfrm>
           <a:prstGeom prst="rect">
             <a:avLst/>
@@ -1722,9 +1696,9 @@
               <a:buNone/>
             </a:pPr>
             <a:r>
-              <a:rPr lang="en-US" sz="720" b="1" dirty="0">
+              <a:rPr lang="en-US" sz="720" dirty="0">
                 <a:solidFill>
-                  <a:srgbClr val="B91C1C"/>
+                  <a:srgbClr val="171717"/>
                 </a:solidFill>
                 <a:latin typeface="PingFang SC" pitchFamily="34" charset="0"/>
                 <a:ea typeface="PingFang SC" pitchFamily="34" charset="-122"/>
@@ -1738,14 +1712,14 @@
       </p:sp>
       <p:sp>
         <p:nvSpPr>
-          <p:cNvPr id="27" name="Text 25"/>
-          <p:cNvSpPr/>
-          <p:nvPr/>
-        </p:nvSpPr>
-        <p:spPr>
-          <a:xfrm>
-            <a:off x="6885432" y="1490472"/>
-            <a:ext cx="2011680" cy="237744"/>
+          <p:cNvPr id="26" name="Text 23"/>
+          <p:cNvSpPr/>
+          <p:nvPr/>
+        </p:nvSpPr>
+        <p:spPr>
+          <a:xfrm>
+            <a:off x="6821424" y="1572768"/>
+            <a:ext cx="2377440" cy="237744"/>
           </a:xfrm>
           <a:prstGeom prst="rect">
             <a:avLst/>
@@ -1771,7 +1745,7 @@
                 <a:ea typeface="PingFang SC" pitchFamily="34" charset="-122"/>
                 <a:cs typeface="PingFang SC" pitchFamily="34" charset="-120"/>
               </a:rPr>
-              <a:t>趋势指数</a:t>
+              <a:t>演进四象</a:t>
             </a:r>
             <a:endParaRPr lang="en-US" sz="1400" dirty="0"/>
           </a:p>
@@ -1779,14 +1753,14 @@
       </p:sp>
       <p:sp>
         <p:nvSpPr>
-          <p:cNvPr id="28" name="Shape 26"/>
-          <p:cNvSpPr/>
-          <p:nvPr/>
-        </p:nvSpPr>
-        <p:spPr>
-          <a:xfrm>
-            <a:off x="6885432" y="1874520"/>
-            <a:ext cx="3840480" cy="0"/>
+          <p:cNvPr id="27" name="Shape 24"/>
+          <p:cNvSpPr/>
+          <p:nvPr/>
+        </p:nvSpPr>
+        <p:spPr>
+          <a:xfrm>
+            <a:off x="6547104" y="1865376"/>
+            <a:ext cx="3968496" cy="0"/>
           </a:xfrm>
           <a:prstGeom prst="line">
             <a:avLst/>
@@ -1804,14 +1778,14 @@
       </p:sp>
       <p:sp>
         <p:nvSpPr>
-          <p:cNvPr id="29" name="Shape 27"/>
-          <p:cNvSpPr/>
-          <p:nvPr/>
-        </p:nvSpPr>
-        <p:spPr>
-          <a:xfrm>
-            <a:off x="6812280" y="4654296"/>
-            <a:ext cx="3840480" cy="0"/>
+          <p:cNvPr id="28" name="Shape 25"/>
+          <p:cNvSpPr/>
+          <p:nvPr/>
+        </p:nvSpPr>
+        <p:spPr>
+          <a:xfrm>
+            <a:off x="6547104" y="4864608"/>
+            <a:ext cx="3968496" cy="0"/>
           </a:xfrm>
           <a:prstGeom prst="line">
             <a:avLst/>
@@ -1829,14 +1803,14 @@
       </p:sp>
       <p:sp>
         <p:nvSpPr>
-          <p:cNvPr id="30" name="Shape 28"/>
-          <p:cNvSpPr/>
-          <p:nvPr/>
-        </p:nvSpPr>
-        <p:spPr>
-          <a:xfrm>
-            <a:off x="7013448" y="3640409"/>
-            <a:ext cx="708660" cy="1013887"/>
+          <p:cNvPr id="29" name="Shape 26"/>
+          <p:cNvSpPr/>
+          <p:nvPr/>
+        </p:nvSpPr>
+        <p:spPr>
+          <a:xfrm>
+            <a:off x="6748272" y="4081150"/>
+            <a:ext cx="740664" cy="783458"/>
           </a:xfrm>
           <a:prstGeom prst="rect">
             <a:avLst/>
@@ -1856,14 +1830,14 @@
       </p:sp>
       <p:sp>
         <p:nvSpPr>
-          <p:cNvPr id="31" name="Text 29"/>
-          <p:cNvSpPr/>
-          <p:nvPr/>
-        </p:nvSpPr>
-        <p:spPr>
-          <a:xfrm>
-            <a:off x="6976872" y="4782312"/>
-            <a:ext cx="781812" cy="164592"/>
+          <p:cNvPr id="30" name="Text 27"/>
+          <p:cNvSpPr/>
+          <p:nvPr/>
+        </p:nvSpPr>
+        <p:spPr>
+          <a:xfrm>
+            <a:off x="6711696" y="4992624"/>
+            <a:ext cx="813816" cy="164592"/>
           </a:xfrm>
           <a:prstGeom prst="rect">
             <a:avLst/>
@@ -1897,14 +1871,14 @@
       </p:sp>
       <p:sp>
         <p:nvSpPr>
-          <p:cNvPr id="32" name="Shape 30"/>
-          <p:cNvSpPr/>
-          <p:nvPr/>
-        </p:nvSpPr>
-        <p:spPr>
-          <a:xfrm>
-            <a:off x="7923276" y="3109326"/>
-            <a:ext cx="708660" cy="1544970"/>
+          <p:cNvPr id="31" name="Shape 28"/>
+          <p:cNvSpPr/>
+          <p:nvPr/>
+        </p:nvSpPr>
+        <p:spPr>
+          <a:xfrm>
+            <a:off x="7690104" y="3493557"/>
+            <a:ext cx="740664" cy="1371051"/>
           </a:xfrm>
           <a:prstGeom prst="rect">
             <a:avLst/>
@@ -1924,14 +1898,14 @@
       </p:sp>
       <p:sp>
         <p:nvSpPr>
-          <p:cNvPr id="33" name="Text 31"/>
-          <p:cNvSpPr/>
-          <p:nvPr/>
-        </p:nvSpPr>
-        <p:spPr>
-          <a:xfrm>
-            <a:off x="7886700" y="4782312"/>
-            <a:ext cx="781812" cy="164592"/>
+          <p:cNvPr id="32" name="Text 29"/>
+          <p:cNvSpPr/>
+          <p:nvPr/>
+        </p:nvSpPr>
+        <p:spPr>
+          <a:xfrm>
+            <a:off x="7653528" y="4992624"/>
+            <a:ext cx="813816" cy="164592"/>
           </a:xfrm>
           <a:prstGeom prst="rect">
             <a:avLst/>
@@ -1965,14 +1939,14 @@
       </p:sp>
       <p:sp>
         <p:nvSpPr>
-          <p:cNvPr id="34" name="Shape 32"/>
-          <p:cNvSpPr/>
-          <p:nvPr/>
-        </p:nvSpPr>
-        <p:spPr>
-          <a:xfrm>
-            <a:off x="8833104" y="2771364"/>
-            <a:ext cx="708660" cy="1882932"/>
+          <p:cNvPr id="33" name="Shape 30"/>
+          <p:cNvSpPr/>
+          <p:nvPr/>
+        </p:nvSpPr>
+        <p:spPr>
+          <a:xfrm>
+            <a:off x="8631936" y="2961924"/>
+            <a:ext cx="740664" cy="1902684"/>
           </a:xfrm>
           <a:prstGeom prst="rect">
             <a:avLst/>
@@ -1992,14 +1966,14 @@
       </p:sp>
       <p:sp>
         <p:nvSpPr>
-          <p:cNvPr id="35" name="Text 33"/>
-          <p:cNvSpPr/>
-          <p:nvPr/>
-        </p:nvSpPr>
-        <p:spPr>
-          <a:xfrm>
-            <a:off x="8796528" y="4782312"/>
-            <a:ext cx="781812" cy="164592"/>
+          <p:cNvPr id="34" name="Text 31"/>
+          <p:cNvSpPr/>
+          <p:nvPr/>
+        </p:nvSpPr>
+        <p:spPr>
+          <a:xfrm>
+            <a:off x="8595360" y="4992624"/>
+            <a:ext cx="813816" cy="164592"/>
           </a:xfrm>
           <a:prstGeom prst="rect">
             <a:avLst/>
@@ -2033,14 +2007,14 @@
       </p:sp>
       <p:sp>
         <p:nvSpPr>
-          <p:cNvPr id="36" name="Shape 34"/>
-          <p:cNvSpPr/>
-          <p:nvPr/>
-        </p:nvSpPr>
-        <p:spPr>
-          <a:xfrm>
-            <a:off x="9742932" y="2457541"/>
-            <a:ext cx="708660" cy="2196755"/>
+          <p:cNvPr id="35" name="Shape 32"/>
+          <p:cNvSpPr/>
+          <p:nvPr/>
+        </p:nvSpPr>
+        <p:spPr>
+          <a:xfrm>
+            <a:off x="9573768" y="2514234"/>
+            <a:ext cx="740664" cy="2350374"/>
           </a:xfrm>
           <a:prstGeom prst="rect">
             <a:avLst/>
@@ -2060,14 +2034,14 @@
       </p:sp>
       <p:sp>
         <p:nvSpPr>
-          <p:cNvPr id="37" name="Text 35"/>
-          <p:cNvSpPr/>
-          <p:nvPr/>
-        </p:nvSpPr>
-        <p:spPr>
-          <a:xfrm>
-            <a:off x="9706356" y="4782312"/>
-            <a:ext cx="781812" cy="164592"/>
+          <p:cNvPr id="36" name="Text 33"/>
+          <p:cNvSpPr/>
+          <p:nvPr/>
+        </p:nvSpPr>
+        <p:spPr>
+          <a:xfrm>
+            <a:off x="9537192" y="4992624"/>
+            <a:ext cx="813816" cy="164592"/>
           </a:xfrm>
           <a:prstGeom prst="rect">
             <a:avLst/>
@@ -2096,6 +2070,113 @@
               <a:t>合</a:t>
             </a:r>
             <a:endParaRPr lang="en-US" sz="680" dirty="0"/>
+          </a:p>
+        </p:txBody>
+      </p:sp>
+      <p:sp>
+        <p:nvSpPr>
+          <p:cNvPr id="37" name="Shape 34"/>
+          <p:cNvSpPr/>
+          <p:nvPr/>
+        </p:nvSpPr>
+        <p:spPr>
+          <a:xfrm>
+            <a:off x="7680960" y="6254496"/>
+            <a:ext cx="475488" cy="0"/>
+          </a:xfrm>
+          <a:prstGeom prst="line">
+            <a:avLst/>
+          </a:prstGeom>
+          <a:noFill/>
+          <a:ln w="19050">
+            <a:solidFill>
+              <a:srgbClr val="B91C1C">
+                <a:alpha val="90000"/>
+              </a:srgbClr>
+            </a:solidFill>
+            <a:prstDash val="solid"/>
+          </a:ln>
+        </p:spPr>
+      </p:sp>
+      <p:sp>
+        <p:nvSpPr>
+          <p:cNvPr id="38" name="Text 35"/>
+          <p:cNvSpPr/>
+          <p:nvPr/>
+        </p:nvSpPr>
+        <p:spPr>
+          <a:xfrm>
+            <a:off x="8302752" y="6163056"/>
+            <a:ext cx="2286000" cy="164592"/>
+          </a:xfrm>
+          <a:prstGeom prst="rect">
+            <a:avLst/>
+          </a:prstGeom>
+          <a:noFill/>
+          <a:ln/>
+        </p:spPr>
+        <p:txBody>
+          <a:bodyPr wrap="square" lIns="0" tIns="0" rIns="0" bIns="0" rtlCol="0" anchor="ctr">
+            <a:normAutofit/>
+          </a:bodyPr>
+          <a:lstStyle/>
+          <a:p>
+            <a:pPr algn="l" indent="0" marL="0">
+              <a:buNone/>
+            </a:pPr>
+            <a:r>
+              <a:rPr lang="en-US" sz="740" dirty="0">
+                <a:solidFill>
+                  <a:srgbClr val="5D6673"/>
+                </a:solidFill>
+                <a:latin typeface="PingFang SC" pitchFamily="34" charset="0"/>
+                <a:ea typeface="PingFang SC" pitchFamily="34" charset="-122"/>
+                <a:cs typeface="PingFang SC" pitchFamily="34" charset="-120"/>
+              </a:rPr>
+              <a:t>文字、数字和图表标签均为 PPT 可编辑对象</a:t>
+            </a:r>
+            <a:endParaRPr lang="en-US" sz="740" dirty="0"/>
+          </a:p>
+        </p:txBody>
+      </p:sp>
+      <p:sp>
+        <p:nvSpPr>
+          <p:cNvPr id="39" name="Text 36"/>
+          <p:cNvSpPr/>
+          <p:nvPr/>
+        </p:nvSpPr>
+        <p:spPr>
+          <a:xfrm>
+            <a:off x="9875520" y="6291072"/>
+            <a:ext cx="914400" cy="146304"/>
+          </a:xfrm>
+          <a:prstGeom prst="rect">
+            <a:avLst/>
+          </a:prstGeom>
+          <a:noFill/>
+          <a:ln/>
+        </p:spPr>
+        <p:txBody>
+          <a:bodyPr wrap="square" lIns="0" tIns="0" rIns="0" bIns="0" rtlCol="0" anchor="ctr">
+            <a:normAutofit/>
+          </a:bodyPr>
+          <a:lstStyle/>
+          <a:p>
+            <a:pPr algn="r" indent="0" marL="0">
+              <a:buNone/>
+            </a:pPr>
+            <a:r>
+              <a:rPr lang="en-US" sz="720" b="1" dirty="0">
+                <a:solidFill>
+                  <a:srgbClr val="B91C1C"/>
+                </a:solidFill>
+                <a:latin typeface="Avenir Next" pitchFamily="34" charset="0"/>
+                <a:ea typeface="Avenir Next" pitchFamily="34" charset="-122"/>
+                <a:cs typeface="Avenir Next" pitchFamily="34" charset="-120"/>
+              </a:rPr>
+              <a:t>国潮东方</a:t>
+            </a:r>
+            <a:endParaRPr lang="en-US" sz="720" dirty="0"/>
           </a:p>
         </p:txBody>
       </p:sp>
